--- a/slide/slide-7-ecr-s3.pptx
+++ b/slide/slide-7-ecr-s3.pptx
@@ -1844,7 +1844,7 @@
           <a:p>
             <a:r>
               <a:rPr lang="en-US" dirty="0"/>
-              <a:t>Riassumendo. Il materiale di studio è la dispensa 7, con ecr.tf e s3.tf spiegati blocco per blocco e l'esercizio con tutti i comandi. La prossima volta mettiamo tutto insieme: GitHub Actions costruisce l'immagine senza chiavi salvate, la carica su ECR, e il server si ricrea da solo con la nuova versione.</a:t>
+              <a:t>Riassumendo. Il materiale di studio è la dispensa 7, con ecr.tf e s3.tf spiegati blocco per blocco e l'esercizio con tutti i comandi. La prossima volta GitHub Actions costruisce l'immagine da solo, senza chiavi salvate, e la carica in ECR; nella lezione 9 il server la metterà in produzione.</a:t>
             </a:r>
             <a:endParaRPr lang="en-US" dirty="0"/>
           </a:p>
@@ -1932,7 +1932,7 @@
           <a:p>
             <a:r>
               <a:rPr lang="en-US" dirty="0"/>
-              <a:t>Ecco il percorso che costruiamo tra oggi e la prossima lezione. Uno: dal codice si costruisce una volta un'immagine, con un nome di versione. Due: l'immagine si conserva in ECR, il magazzino delle immagini; i file di deploy, come il docker-compose, si conservano in S3. Tre: il server, all'avvio, scarica l'immagine e i file, e legge la password da Secrets Manager. Oggi costruiamo i due magazzini. Nella lezione 8 il passo uno lo farà da solo GitHub Actions, e il passo tre il server.</a:t>
+              <a:t>Ecco il percorso che costruiamo tra oggi e la prossima lezione. Uno: dal codice si costruisce una volta un'immagine, con un nome di versione. Due: l'immagine si conserva in ECR, il magazzino delle immagini; i file di deploy, come il docker-compose, si conservano in S3. Tre: il server, all'avvio, scarica l'immagine e i file, e legge la password da Secrets Manager. Oggi costruiamo i due magazzini. Nella lezione 8 il passo uno lo farà da solo GitHub Actions; nella lezione 9 il passo tre lo farà il server.</a:t>
             </a:r>
             <a:endParaRPr lang="en-US" dirty="0"/>
           </a:p>
@@ -16271,7 +16271,7 @@
                 <a:ea typeface="Calibri" pitchFamily="34" charset="-122"/>
                 <a:cs typeface="Calibri" pitchFamily="34" charset="-120"/>
               </a:rPr>
-              <a:t>Deploy end-to-end</a:t>
+              <a:t>GitHub costruisce l'immagine</a:t>
             </a:r>
             <a:endParaRPr lang="en-US" sz="1400" dirty="0"/>
           </a:p>
@@ -16986,7 +16986,7 @@
                           <a:ea typeface="Calibri" pitchFamily="34" charset="-122"/>
                           <a:cs typeface="Calibri" pitchFamily="34" charset="-120"/>
                         </a:rPr>
-                        <a:t>Lezione 8</a:t>
+                        <a:t>Lezioni 8 e 9</a:t>
                       </a:r>
                       <a:endParaRPr lang="en-US" sz="1600" dirty="0">
                         <a:latin typeface="Calibri" charset="0"/>
@@ -19929,7 +19929,7 @@
                 <a:ea typeface="Calibri" pitchFamily="34" charset="-122"/>
                 <a:cs typeface="Calibri" pitchFamily="34" charset="-120"/>
               </a:rPr>
-              <a:t>Più container insieme sullo stesso server (app, cache…): docker compose, nella lezione 8.</a:t>
+              <a:t>Più container insieme sullo stesso server (app, cache…): docker compose, nella lezione 9.</a:t>
             </a:r>
             <a:endParaRPr lang="en-US" sz="1500" dirty="0"/>
           </a:p>
